--- a/presentation/kosmo-nizni_klodiki_148.pptx
+++ b/presentation/kosmo-nizni_klodiki_148.pptx
@@ -1708,7 +1708,7 @@
           <a:lstStyle/>
           <a:p>
             <a:r>
-              <a:t>2:50–3:30 (затем финальная фраза до 4:00). Резюме оставить на экране во время вопросов: 3/3 выше цели, каждый разрыв объясним, сравнение до решения. Рекомендация: среди исследованных сценариев — полная группировка и ISL 3000 км.</a:t>
+              <a:t>2:50–3:30 (финальная фраза до 4:00). Резюме оставить на экране во время вопросов: 3/3 выше цели, каждый разрыв объясним, сравнение до решения. Рекомендация: среди исследованных сценариев — полная группировка и ISL 3000 км.</a:t>
             </a:r>
           </a:p>
         </p:txBody>

--- a/presentation/kosmo-nizni_klodiki_148.pptx
+++ b/presentation/kosmo-nizni_klodiki_148.pptx
@@ -1106,8 +1106,10 @@
           <a:lstStyle/>
           <a:p>
             <a:r>
-              <a:t>0:00–0:15. «Инженерный веб-сервис для проектирования и проверки устойчивости спутниковой группировки». Условия не пересказываем — жюри знает кейс.</a:t>
-            </a:r>
+              <a:rPr lang="en-US" dirty="0"/>
+              <a:t/>
+            </a:r>
+            <a:endParaRPr lang="en-US" dirty="0"/>
           </a:p>
         </p:txBody>
       </p:sp>
@@ -1192,8 +1194,10 @@
           <a:lstStyle/>
           <a:p>
             <a:r>
-              <a:t>BACKUP. «Какие аппараты самые уязвимые? Есть ли резерв?» — top-критичность с числами, node-disjoint резерв.</a:t>
-            </a:r>
+              <a:rPr lang="en-US" dirty="0"/>
+              <a:t/>
+            </a:r>
+            <a:endParaRPr lang="en-US" dirty="0"/>
           </a:p>
         </p:txBody>
       </p:sp>
@@ -1278,8 +1282,10 @@
           <a:lstStyle/>
           <a:p>
             <a:r>
-              <a:t>BACKUP. «Что дальше / где ограничения?» — рельеф и застройка как horizon mask поверх официальной модели.</a:t>
-            </a:r>
+              <a:rPr lang="en-US" dirty="0"/>
+              <a:t/>
+            </a:r>
+            <a:endParaRPr lang="en-US" dirty="0"/>
           </a:p>
         </p:txBody>
       </p:sp>
@@ -1364,8 +1370,10 @@
           <a:lstStyle/>
           <a:p>
             <a:r>
-              <a:t>0:15–0:45. Главная мысль: видимый спутник ≠ связь. Нужен полный маршрут клиент → спутник → МСC → шлюз. Наш сервис проектирует конфигурацию, пересчитывает сеть и объясняет каждый разрыв.</a:t>
-            </a:r>
+              <a:rPr lang="en-US" dirty="0"/>
+              <a:t/>
+            </a:r>
+            <a:endParaRPr lang="en-US" dirty="0"/>
           </a:p>
         </p:txBody>
       </p:sp>
@@ -1450,8 +1458,10 @@
           <a:lstStyle/>
           <a:p>
             <a:r>
-              <a:t>0:45–1:25. Показываем глазами цепочку: слева настройки конфигурации → в центре сеть и маршрут/причина → справа итоги и рекомендация. (Если есть скринкаст ≤20 сек — здесь.)</a:t>
-            </a:r>
+              <a:rPr lang="en-US" dirty="0"/>
+              <a:t/>
+            </a:r>
+            <a:endParaRPr lang="en-US" dirty="0"/>
           </a:p>
         </p:txBody>
       </p:sp>
@@ -1536,8 +1546,10 @@
           <a:lstStyle/>
           <a:p>
             <a:r>
-              <a:t>1:25–2:10. Не читать все 12 чисел! Сказать: полная группировка — 3 из 3 пунктов выше цели (96.7–98.9%); первая очередь — 12.6–27.2% с перерывами до 13 часов; стресс-сценарии показывают границы архитектуры.</a:t>
-            </a:r>
+              <a:rPr lang="en-US" dirty="0"/>
+              <a:t/>
+            </a:r>
+            <a:endParaRPr lang="en-US" dirty="0"/>
           </a:p>
         </p:txBody>
       </p:sp>
@@ -1622,8 +1634,10 @@
           <a:lstStyle/>
           <a:p>
             <a:r>
-              <a:t>2:10–2:50. «Мы не только фиксируем отказ связи — мы показываем причину, перестроение маршрута и последствия для каждого пункта. S44 — самый критичный аппарат по нашему анализу: отказ снижает min-доступность на 2.36 п.п.»</a:t>
-            </a:r>
+              <a:rPr lang="en-US" dirty="0"/>
+              <a:t/>
+            </a:r>
+            <a:endParaRPr lang="en-US" dirty="0"/>
           </a:p>
         </p:txBody>
       </p:sp>
@@ -1708,8 +1722,10 @@
           <a:lstStyle/>
           <a:p>
             <a:r>
-              <a:t>2:50–3:30 (финальная фраза до 4:00). Резюме оставить на экране во время вопросов: 3/3 выше цели, каждый разрыв объясним, сравнение до решения. Рекомендация: среди исследованных сценариев — полная группировка и ISL 3000 км.</a:t>
-            </a:r>
+              <a:rPr lang="en-US" dirty="0"/>
+              <a:t/>
+            </a:r>
+            <a:endParaRPr lang="en-US" dirty="0"/>
           </a:p>
         </p:txBody>
       </p:sp>
@@ -1794,8 +1810,10 @@
           <a:lstStyle/>
           <a:p>
             <a:r>
-              <a:t>BACKUP. Отвечает на вопрос «почему такой алгоритм маршрутизации?» — Дейкстра по длине, детерминизм, parity с официальным модулем.</a:t>
-            </a:r>
+              <a:rPr lang="en-US" dirty="0"/>
+              <a:t/>
+            </a:r>
+            <a:endParaRPr lang="en-US" dirty="0"/>
           </a:p>
         </p:txBody>
       </p:sp>
@@ -1880,8 +1898,10 @@
           <a:lstStyle/>
           <a:p>
             <a:r>
-              <a:t>BACKUP. «Как проверяли корректность?» — 131 тест, чистый запуск по README, Docker, воспроизводимость.</a:t>
-            </a:r>
+              <a:rPr lang="en-US" dirty="0"/>
+              <a:t/>
+            </a:r>
+            <a:endParaRPr lang="en-US" dirty="0"/>
           </a:p>
         </p:txBody>
       </p:sp>
@@ -1966,8 +1986,10 @@
           <a:lstStyle/>
           <a:p>
             <a:r>
-              <a:t>BACKUP. «Как устроен экспорт?» — строгая официальная схема, реимпорт effective_scenario, analysis report отдельно.</a:t>
-            </a:r>
+              <a:rPr lang="en-US" dirty="0"/>
+              <a:t/>
+            </a:r>
+            <a:endParaRPr lang="en-US" dirty="0"/>
           </a:p>
         </p:txBody>
       </p:sp>
@@ -5577,7 +5599,7 @@
                 <a:ea typeface="Arial" pitchFamily="34" charset="-122"/>
                 <a:cs typeface="Arial" pitchFamily="34" charset="-120"/>
               </a:rPr>
-              <a:t>Полная группировка</a:t>
+              <a:t>Полная группировка (этап 3)</a:t>
             </a:r>
             <a:endParaRPr lang="en-US" sz="1300" dirty="0"/>
           </a:p>
@@ -5692,7 +5714,7 @@
                 <a:ea typeface="Arial" pitchFamily="34" charset="-122"/>
                 <a:cs typeface="Arial" pitchFamily="34" charset="-120"/>
               </a:rPr>
-              <a:t>1-я очередь</a:t>
+              <a:t>Вторая очередь (этап 2)</a:t>
             </a:r>
             <a:endParaRPr lang="en-US" sz="1300" dirty="0"/>
           </a:p>
@@ -5731,7 +5753,7 @@
                 <a:ea typeface="Arial" pitchFamily="34" charset="-122"/>
                 <a:cs typeface="Arial" pitchFamily="34" charset="-120"/>
               </a:rPr>
-              <a:t>12.6–27.2%</a:t>
+              <a:t>61.8–66.0%</a:t>
             </a:r>
             <a:pPr indent="0" marL="0">
               <a:buNone/>
@@ -5745,7 +5767,7 @@
                 <a:ea typeface="Arial" pitchFamily="34" charset="-122"/>
                 <a:cs typeface="Arial" pitchFamily="34" charset="-120"/>
               </a:rPr>
-              <a:t>  ·  перерывы до 13.3 ч</a:t>
+              <a:t>  ·  перерывы до 5.5 ч</a:t>
             </a:r>
             <a:endParaRPr lang="en-US" sz="1200" dirty="0"/>
           </a:p>
@@ -5807,7 +5829,7 @@
                 <a:ea typeface="Arial" pitchFamily="34" charset="-122"/>
                 <a:cs typeface="Arial" pitchFamily="34" charset="-120"/>
               </a:rPr>
-              <a:t>10 аппаратов в отказе</a:t>
+              <a:t>Первая очередь (этап 1)</a:t>
             </a:r>
             <a:endParaRPr lang="en-US" sz="1300" dirty="0"/>
           </a:p>
@@ -5846,7 +5868,7 @@
                 <a:ea typeface="Arial" pitchFamily="34" charset="-122"/>
                 <a:cs typeface="Arial" pitchFamily="34" charset="-120"/>
               </a:rPr>
-              <a:t>79.3–82.5%</a:t>
+              <a:t>12.6–27.2%</a:t>
             </a:r>
             <a:pPr indent="0" marL="0">
               <a:buNone/>
@@ -5860,7 +5882,7 @@
                 <a:ea typeface="Arial" pitchFamily="34" charset="-122"/>
                 <a:cs typeface="Arial" pitchFamily="34" charset="-120"/>
               </a:rPr>
-              <a:t>  ·  перерывы 20–24 мин</a:t>
+              <a:t>  ·  перерывы до 13.3 ч</a:t>
             </a:r>
             <a:endParaRPr lang="en-US" sz="1200" dirty="0"/>
           </a:p>
@@ -5922,7 +5944,7 @@
                 <a:ea typeface="Arial" pitchFamily="34" charset="-122"/>
                 <a:cs typeface="Arial" pitchFamily="34" charset="-120"/>
               </a:rPr>
-              <a:t>МСC 2000 км</a:t>
+              <a:t>10 отказов · МСC 2000 км</a:t>
             </a:r>
             <a:endParaRPr lang="en-US" sz="1300" dirty="0"/>
           </a:p>
@@ -5961,7 +5983,7 @@
                 <a:ea typeface="Arial" pitchFamily="34" charset="-122"/>
                 <a:cs typeface="Arial" pitchFamily="34" charset="-120"/>
               </a:rPr>
-              <a:t>62.2–77.5%</a:t>
+              <a:t>62.2–82.5%</a:t>
             </a:r>
             <a:pPr indent="0" marL="0">
               <a:buNone/>
@@ -8204,7 +8226,7 @@
                 <a:ea typeface="Arial" pitchFamily="34" charset="-122"/>
                 <a:cs typeface="Arial" pitchFamily="34" charset="-120"/>
               </a:rPr>
-              <a:t>Маршрут — Дейкстра по физической длине доступных линий связи. </a:t>
+              <a:t>Маршрут по реальной геометрии сети. </a:t>
             </a:r>
             <a:endParaRPr lang="en-US" sz="1400" dirty="0"/>
           </a:p>

--- a/presentation/kosmo-nizni_klodiki_148.pptx
+++ b/presentation/kosmo-nizni_klodiki_148.pptx
@@ -2962,7 +2962,7 @@
                 <a:ea typeface="Arial" pitchFamily="34" charset="-122"/>
                 <a:cs typeface="Arial" pitchFamily="34" charset="-120"/>
               </a:rPr>
-              <a:t>Single points of failure и запас прочности сети</a:t>
+              <a:t>Критичные аппараты при одиночном отказе и запас прочности сети</a:t>
             </a:r>
             <a:endParaRPr lang="en-US" sz="2800" dirty="0"/>
           </a:p>
@@ -3398,7 +3398,7 @@
         </p:nvSpPr>
         <p:spPr>
           <a:xfrm>
-            <a:off x="7452360" y="1828800"/>
+            <a:off x="7452360" y="1965960"/>
             <a:ext cx="3931920" cy="365760"/>
           </a:xfrm>
           <a:prstGeom prst="rect">
@@ -3437,22 +3437,22 @@
         </p:nvSpPr>
         <p:spPr>
           <a:xfrm>
-            <a:off x="7452360" y="2286000"/>
-            <a:ext cx="3977640" cy="3383280"/>
-          </a:xfrm>
-          <a:prstGeom prst="rect">
-            <a:avLst/>
-          </a:prstGeom>
-          <a:noFill/>
-          <a:ln/>
-        </p:spPr>
-        <p:txBody>
-          <a:bodyPr wrap="square" lIns="0" tIns="0" rIns="0" bIns="0" rtlCol="0" anchor="ctr"/>
+            <a:off x="7452360" y="2377440"/>
+            <a:ext cx="3977640" cy="3474720"/>
+          </a:xfrm>
+          <a:prstGeom prst="rect">
+            <a:avLst/>
+          </a:prstGeom>
+          <a:noFill/>
+          <a:ln/>
+        </p:spPr>
+        <p:txBody>
+          <a:bodyPr wrap="square" lIns="0" tIns="0" rIns="0" bIns="0" rtlCol="0" anchor="t"/>
           <a:lstStyle/>
           <a:p>
             <a:pPr marL="152400" indent="-152400">
               <a:spcAft>
-                <a:spcPts val="1000"/>
+                <a:spcPts val="1200"/>
               </a:spcAft>
               <a:buSzPct val="100000"/>
               <a:buChar char="▸"/>
@@ -3473,7 +3473,7 @@
           <a:p>
             <a:pPr marL="152400" indent="-152400">
               <a:spcAft>
-                <a:spcPts val="1000"/>
+                <a:spcPts val="1200"/>
               </a:spcAft>
               <a:buSzPct val="100000"/>
               <a:buChar char="▸"/>
@@ -3494,7 +3494,7 @@
           <a:p>
             <a:pPr marL="152400" indent="-152400">
               <a:spcAft>
-                <a:spcPts val="1000"/>
+                <a:spcPts val="1200"/>
               </a:spcAft>
               <a:buSzPct val="100000"/>
               <a:buChar char="▸"/>
@@ -3515,7 +3515,7 @@
           <a:p>
             <a:pPr marL="152400" indent="-152400">
               <a:spcAft>
-                <a:spcPts val="1000"/>
+                <a:spcPts val="1200"/>
               </a:spcAft>
               <a:buSzPct val="100000"/>
               <a:buChar char="▸"/>
@@ -5574,7 +5574,7 @@
         </p:nvSpPr>
         <p:spPr>
           <a:xfrm>
-            <a:off x="7863840" y="2743200"/>
+            <a:off x="7863840" y="2697480"/>
             <a:ext cx="3840480" cy="274320"/>
           </a:xfrm>
           <a:prstGeom prst="rect">
@@ -5613,7 +5613,7 @@
         </p:nvSpPr>
         <p:spPr>
           <a:xfrm>
-            <a:off x="7863840" y="3017520"/>
+            <a:off x="7863840" y="2971800"/>
             <a:ext cx="3840480" cy="274320"/>
           </a:xfrm>
           <a:prstGeom prst="rect">
@@ -5666,7 +5666,7 @@
         </p:nvSpPr>
         <p:spPr>
           <a:xfrm>
-            <a:off x="7863840" y="3401568"/>
+            <a:off x="7863840" y="3300984"/>
             <a:ext cx="3749040" cy="0"/>
           </a:xfrm>
           <a:prstGeom prst="line">
@@ -5689,7 +5689,7 @@
         </p:nvSpPr>
         <p:spPr>
           <a:xfrm>
-            <a:off x="7863840" y="3584448"/>
+            <a:off x="7863840" y="3429000"/>
             <a:ext cx="3840480" cy="274320"/>
           </a:xfrm>
           <a:prstGeom prst="rect">
@@ -5728,7 +5728,7 @@
         </p:nvSpPr>
         <p:spPr>
           <a:xfrm>
-            <a:off x="7863840" y="3858768"/>
+            <a:off x="7863840" y="3703320"/>
             <a:ext cx="3840480" cy="274320"/>
           </a:xfrm>
           <a:prstGeom prst="rect">
@@ -5781,7 +5781,7 @@
         </p:nvSpPr>
         <p:spPr>
           <a:xfrm>
-            <a:off x="7863840" y="4242816"/>
+            <a:off x="7863840" y="4032504"/>
             <a:ext cx="3749040" cy="0"/>
           </a:xfrm>
           <a:prstGeom prst="line">
@@ -5804,7 +5804,7 @@
         </p:nvSpPr>
         <p:spPr>
           <a:xfrm>
-            <a:off x="7863840" y="4425696"/>
+            <a:off x="7863840" y="4160520"/>
             <a:ext cx="3840480" cy="274320"/>
           </a:xfrm>
           <a:prstGeom prst="rect">
@@ -5843,7 +5843,7 @@
         </p:nvSpPr>
         <p:spPr>
           <a:xfrm>
-            <a:off x="7863840" y="4700016"/>
+            <a:off x="7863840" y="4434840"/>
             <a:ext cx="3840480" cy="274320"/>
           </a:xfrm>
           <a:prstGeom prst="rect">
@@ -5896,7 +5896,7 @@
         </p:nvSpPr>
         <p:spPr>
           <a:xfrm>
-            <a:off x="7863840" y="5084064"/>
+            <a:off x="7863840" y="4764024"/>
             <a:ext cx="3749040" cy="0"/>
           </a:xfrm>
           <a:prstGeom prst="line">
@@ -5919,7 +5919,7 @@
         </p:nvSpPr>
         <p:spPr>
           <a:xfrm>
-            <a:off x="7863840" y="5266944"/>
+            <a:off x="7863840" y="4892040"/>
             <a:ext cx="3840480" cy="274320"/>
           </a:xfrm>
           <a:prstGeom prst="rect">
@@ -5944,7 +5944,7 @@
                 <a:ea typeface="Arial" pitchFamily="34" charset="-122"/>
                 <a:cs typeface="Arial" pitchFamily="34" charset="-120"/>
               </a:rPr>
-              <a:t>10 отказов · МСC 2000 км</a:t>
+              <a:t>10 аппаратов в отказе</a:t>
             </a:r>
             <a:endParaRPr lang="en-US" sz="1300" dirty="0"/>
           </a:p>
@@ -5958,7 +5958,7 @@
         </p:nvSpPr>
         <p:spPr>
           <a:xfrm>
-            <a:off x="7863840" y="5541264"/>
+            <a:off x="7863840" y="5166360"/>
             <a:ext cx="3840480" cy="274320"/>
           </a:xfrm>
           <a:prstGeom prst="rect">
@@ -5983,7 +5983,7 @@
                 <a:ea typeface="Arial" pitchFamily="34" charset="-122"/>
                 <a:cs typeface="Arial" pitchFamily="34" charset="-120"/>
               </a:rPr>
-              <a:t>62.2–82.5%</a:t>
+              <a:t>79.3–82.5%</a:t>
             </a:r>
             <a:pPr indent="0" marL="0">
               <a:buNone/>
@@ -5997,7 +5997,7 @@
                 <a:ea typeface="Arial" pitchFamily="34" charset="-122"/>
                 <a:cs typeface="Arial" pitchFamily="34" charset="-120"/>
               </a:rPr>
-              <a:t>  ·  перерывы до 3 ч</a:t>
+              <a:t>  ·  перерывы до 24 мин</a:t>
             </a:r>
             <a:endParaRPr lang="en-US" sz="1200" dirty="0"/>
           </a:p>
@@ -6005,7 +6005,122 @@
       </p:sp>
       <p:sp>
         <p:nvSpPr>
-          <p:cNvPr id="21" name="Text 18"/>
+          <p:cNvPr id="21" name="Shape 18"/>
+          <p:cNvSpPr/>
+          <p:nvPr/>
+        </p:nvSpPr>
+        <p:spPr>
+          <a:xfrm>
+            <a:off x="7863840" y="5495544"/>
+            <a:ext cx="3749040" cy="0"/>
+          </a:xfrm>
+          <a:prstGeom prst="line">
+            <a:avLst/>
+          </a:prstGeom>
+          <a:noFill/>
+          <a:ln w="12700">
+            <a:solidFill>
+              <a:srgbClr val="DFE7EE"/>
+            </a:solidFill>
+            <a:prstDash val="solid"/>
+          </a:ln>
+        </p:spPr>
+      </p:sp>
+      <p:sp>
+        <p:nvSpPr>
+          <p:cNvPr id="22" name="Text 19"/>
+          <p:cNvSpPr/>
+          <p:nvPr/>
+        </p:nvSpPr>
+        <p:spPr>
+          <a:xfrm>
+            <a:off x="7863840" y="5623560"/>
+            <a:ext cx="3840480" cy="274320"/>
+          </a:xfrm>
+          <a:prstGeom prst="rect">
+            <a:avLst/>
+          </a:prstGeom>
+          <a:noFill/>
+          <a:ln/>
+        </p:spPr>
+        <p:txBody>
+          <a:bodyPr wrap="square" lIns="0" tIns="0" rIns="0" bIns="0" rtlCol="0" anchor="ctr"/>
+          <a:lstStyle/>
+          <a:p>
+            <a:pPr indent="0" marL="0">
+              <a:buNone/>
+            </a:pPr>
+            <a:r>
+              <a:rPr lang="en-US" sz="1300" b="1" dirty="0">
+                <a:solidFill>
+                  <a:srgbClr val="16222E"/>
+                </a:solidFill>
+                <a:latin typeface="Arial" pitchFamily="34" charset="0"/>
+                <a:ea typeface="Arial" pitchFamily="34" charset="-122"/>
+                <a:cs typeface="Arial" pitchFamily="34" charset="-120"/>
+              </a:rPr>
+              <a:t>МСC 2000 км</a:t>
+            </a:r>
+            <a:endParaRPr lang="en-US" sz="1300" dirty="0"/>
+          </a:p>
+        </p:txBody>
+      </p:sp>
+      <p:sp>
+        <p:nvSpPr>
+          <p:cNvPr id="23" name="Text 20"/>
+          <p:cNvSpPr/>
+          <p:nvPr/>
+        </p:nvSpPr>
+        <p:spPr>
+          <a:xfrm>
+            <a:off x="7863840" y="5897880"/>
+            <a:ext cx="3840480" cy="274320"/>
+          </a:xfrm>
+          <a:prstGeom prst="rect">
+            <a:avLst/>
+          </a:prstGeom>
+          <a:noFill/>
+          <a:ln/>
+        </p:spPr>
+        <p:txBody>
+          <a:bodyPr wrap="square" lIns="0" tIns="0" rIns="0" bIns="0" rtlCol="0" anchor="ctr"/>
+          <a:lstStyle/>
+          <a:p>
+            <a:pPr indent="0" marL="0">
+              <a:buNone/>
+            </a:pPr>
+            <a:r>
+              <a:rPr lang="en-US" sz="1200" b="1" dirty="0">
+                <a:solidFill>
+                  <a:srgbClr val="C62828"/>
+                </a:solidFill>
+                <a:latin typeface="Arial" pitchFamily="34" charset="0"/>
+                <a:ea typeface="Arial" pitchFamily="34" charset="-122"/>
+                <a:cs typeface="Arial" pitchFamily="34" charset="-120"/>
+              </a:rPr>
+              <a:t>62.2–77.5%</a:t>
+            </a:r>
+            <a:pPr indent="0" marL="0">
+              <a:buNone/>
+            </a:pPr>
+            <a:r>
+              <a:rPr lang="en-US" sz="1200" dirty="0">
+                <a:solidFill>
+                  <a:srgbClr val="5B6B7C"/>
+                </a:solidFill>
+                <a:latin typeface="Arial" pitchFamily="34" charset="0"/>
+                <a:ea typeface="Arial" pitchFamily="34" charset="-122"/>
+                <a:cs typeface="Arial" pitchFamily="34" charset="-120"/>
+              </a:rPr>
+              <a:t>  ·  перерывы до 2 ч 58 мин</a:t>
+            </a:r>
+            <a:endParaRPr lang="en-US" sz="1200" dirty="0"/>
+          </a:p>
+        </p:txBody>
+      </p:sp>
+      <p:sp>
+        <p:nvSpPr>
+          <p:cNvPr id="24" name="Text 21"/>
           <p:cNvSpPr/>
           <p:nvPr/>
         </p:nvSpPr>
@@ -6271,7 +6386,7 @@
                 <a:ea typeface="Arial" pitchFamily="34" charset="-122"/>
                 <a:cs typeface="Arial" pitchFamily="34" charset="-120"/>
               </a:rPr>
-              <a:t>самый критичный аппарат
+              <a:t>№1 в ранжировании критичности
 по single-outage анализу:
 </a:t>
             </a:r>
@@ -7095,7 +7210,7 @@
                 <a:ea typeface="Arial" pitchFamily="34" charset="-122"/>
                 <a:cs typeface="Arial" pitchFamily="34" charset="-120"/>
               </a:rPr>
-              <a:t>4 из 4</a:t>
+              <a:t>4</a:t>
             </a:r>
             <a:endParaRPr lang="en-US" sz="3800" dirty="0"/>
           </a:p>
@@ -7134,7 +7249,7 @@
                 <a:ea typeface="Arial" pitchFamily="34" charset="-122"/>
                 <a:cs typeface="Arial" pitchFamily="34" charset="-120"/>
               </a:rPr>
-              <a:t>категорий причин разрыва —</a:t>
+              <a:t>категории причин разрыва —</a:t>
             </a:r>
             <a:endParaRPr lang="en-US" sz="1250" dirty="0"/>
           </a:p>
@@ -7317,8 +7432,8 @@
         </p:nvSpPr>
         <p:spPr>
           <a:xfrm>
-            <a:off x="548640" y="3383280"/>
-            <a:ext cx="9144000" cy="320040"/>
+            <a:off x="548640" y="3273552"/>
+            <a:ext cx="9144000" cy="274320"/>
           </a:xfrm>
           <a:prstGeom prst="rect">
             <a:avLst/>
@@ -7356,7 +7471,7 @@
         </p:nvSpPr>
         <p:spPr>
           <a:xfrm>
-            <a:off x="548640" y="3730752"/>
+            <a:off x="548640" y="3584448"/>
             <a:ext cx="8595360" cy="1097280"/>
           </a:xfrm>
           <a:prstGeom prst="rect">
@@ -7376,7 +7491,7 @@
               <a:buNone/>
             </a:pPr>
             <a:r>
-              <a:rPr lang="en-US" sz="2200" b="1" dirty="0">
+              <a:rPr lang="en-US" sz="2000" b="1" dirty="0">
                 <a:solidFill>
                   <a:srgbClr val="EAF2F8"/>
                 </a:solidFill>
@@ -7384,9 +7499,9 @@
                 <a:ea typeface="Arial" pitchFamily="34" charset="-122"/>
                 <a:cs typeface="Arial" pitchFamily="34" charset="-120"/>
               </a:rPr>
-              <a:t>Среди исследованных сценариев и проверенных конфигураций ≥90%</a:t>
-            </a:r>
-            <a:endParaRPr lang="en-US" sz="2200" dirty="0"/>
+              <a:t>Среди проверенных этапов развертывания и стресс-сценариев целевой</a:t>
+            </a:r>
+            <a:endParaRPr lang="en-US" sz="2000" dirty="0"/>
           </a:p>
           <a:p>
             <a:pPr indent="0" marL="0">
@@ -7396,7 +7511,7 @@
               <a:buNone/>
             </a:pPr>
             <a:r>
-              <a:rPr lang="en-US" sz="2200" b="1" dirty="0">
+              <a:rPr lang="en-US" sz="2000" b="1" dirty="0">
                 <a:solidFill>
                   <a:srgbClr val="EAF2F8"/>
                 </a:solidFill>
@@ -7404,9 +7519,29 @@
                 <a:ea typeface="Arial" pitchFamily="34" charset="-122"/>
                 <a:cs typeface="Arial" pitchFamily="34" charset="-120"/>
               </a:rPr>
-              <a:t>для всех трёх пунктов обеспечивает полная группировка при ISL 3000 км</a:t>
-            </a:r>
-            <a:endParaRPr lang="en-US" sz="2200" dirty="0"/>
+              <a:t>уровень ≥90% для всех трёх пунктов достигается только на этапе 3</a:t>
+            </a:r>
+            <a:endParaRPr lang="en-US" sz="2000" dirty="0"/>
+          </a:p>
+          <a:p>
+            <a:pPr indent="0" marL="0">
+              <a:lnSpc>
+                <a:spcPts val="2800"/>
+              </a:lnSpc>
+              <a:buNone/>
+            </a:pPr>
+            <a:r>
+              <a:rPr lang="en-US" sz="2000" b="1" dirty="0">
+                <a:solidFill>
+                  <a:srgbClr val="EAF2F8"/>
+                </a:solidFill>
+                <a:latin typeface="Arial" pitchFamily="34" charset="0"/>
+                <a:ea typeface="Arial" pitchFamily="34" charset="-122"/>
+                <a:cs typeface="Arial" pitchFamily="34" charset="-120"/>
+              </a:rPr>
+              <a:t>при штатной дальности ISL 3000 км</a:t>
+            </a:r>
+            <a:endParaRPr lang="en-US" sz="2000" dirty="0"/>
           </a:p>
         </p:txBody>
       </p:sp>
@@ -7418,24 +7553,24 @@
         </p:nvSpPr>
         <p:spPr>
           <a:xfrm>
-            <a:off x="548640" y="4864608"/>
-            <a:ext cx="8595360" cy="365760"/>
-          </a:xfrm>
-          <a:prstGeom prst="rect">
-            <a:avLst/>
-          </a:prstGeom>
-          <a:noFill/>
-          <a:ln/>
-        </p:spPr>
-        <p:txBody>
-          <a:bodyPr wrap="square" lIns="0" tIns="0" rIns="0" bIns="0" rtlCol="0" anchor="ctr"/>
-          <a:lstStyle/>
-          <a:p>
-            <a:pPr indent="0" marL="0">
-              <a:buNone/>
-            </a:pPr>
-            <a:r>
-              <a:rPr lang="en-US" sz="1400" dirty="0">
+            <a:off x="548640" y="4736592"/>
+            <a:ext cx="8595360" cy="320040"/>
+          </a:xfrm>
+          <a:prstGeom prst="rect">
+            <a:avLst/>
+          </a:prstGeom>
+          <a:noFill/>
+          <a:ln/>
+        </p:spPr>
+        <p:txBody>
+          <a:bodyPr wrap="square" lIns="0" tIns="0" rIns="0" bIns="0" rtlCol="0" anchor="ctr"/>
+          <a:lstStyle/>
+          <a:p>
+            <a:pPr indent="0" marL="0">
+              <a:buNone/>
+            </a:pPr>
+            <a:r>
+              <a:rPr lang="en-US" sz="1350" dirty="0">
                 <a:solidFill>
                   <a:srgbClr val="8FA5B8"/>
                 </a:solidFill>
@@ -7445,7 +7580,7 @@
               </a:rPr>
               <a:t>96.7–98.9% доступности  ·  каждый разрыв воспроизводим в сервисе и в тестах</a:t>
             </a:r>
-            <a:endParaRPr lang="en-US" sz="1400" dirty="0"/>
+            <a:endParaRPr lang="en-US" sz="1350" dirty="0"/>
           </a:p>
         </p:txBody>
       </p:sp>
@@ -9241,7 +9376,7 @@
                 <a:ea typeface="Arial" pitchFamily="34" charset="-122"/>
                 <a:cs typeface="Arial" pitchFamily="34" charset="-120"/>
               </a:rPr>
-              <a:t>Строгий официальный формат — и отдельный файл анализа</a:t>
+              <a:t>Минимальный официальный формат + отдельный файл анализа</a:t>
             </a:r>
             <a:endParaRPr lang="en-US" sz="2800" dirty="0"/>
           </a:p>
@@ -9497,8 +9632,8 @@
         </p:nvSpPr>
         <p:spPr>
           <a:xfrm>
-            <a:off x="868680" y="5440680"/>
-            <a:ext cx="4937760" cy="457200"/>
+            <a:off x="868680" y="5212080"/>
+            <a:ext cx="4937760" cy="502920"/>
           </a:xfrm>
           <a:prstGeom prst="rect">
             <a:avLst/>
@@ -9522,7 +9657,7 @@
                 <a:ea typeface="Arial" pitchFamily="34" charset="-122"/>
                 <a:cs typeface="Arial" pitchFamily="34" charset="-120"/>
               </a:rPr>
-              <a:t>result.json — ровно обязательные поля, без дополнений: структура критична</a:t>
+              <a:t>Расширения официальный формат допускает — мы сознательно вынесли их в analysis_report.json</a:t>
             </a:r>
             <a:endParaRPr lang="en-US" sz="1150" dirty="0"/>
           </a:p>

--- a/presentation/kosmo-nizni_klodiki_148.pptx
+++ b/presentation/kosmo-nizni_klodiki_148.pptx
@@ -2706,7 +2706,7 @@
                 <a:ea typeface="Arial" pitchFamily="34" charset="-122"/>
                 <a:cs typeface="Arial" pitchFamily="34" charset="-120"/>
               </a:rPr>
-              <a:t>Сервис открыт прямо сейчас —</a:t>
+              <a:t>Демо-сервис — откройте</a:t>
             </a:r>
             <a:endParaRPr lang="en-US" sz="1000" dirty="0"/>
           </a:p>
@@ -2723,7 +2723,7 @@
                 <a:ea typeface="Arial" pitchFamily="34" charset="-122"/>
                 <a:cs typeface="Arial" pitchFamily="34" charset="-120"/>
               </a:rPr>
-              <a:t>отсканируйте и попробуйте сами</a:t>
+              <a:t>и попробуйте сами</a:t>
             </a:r>
             <a:endParaRPr lang="en-US" sz="1000" dirty="0"/>
           </a:p>
@@ -3106,7 +3106,7 @@
                 <a:ea typeface="Arial" pitchFamily="34" charset="-122"/>
                 <a:cs typeface="Arial" pitchFamily="34" charset="-120"/>
               </a:rPr>
-              <a:t>Δmin 2.36 п.п.   ·   Δmean 2.08 п.п.   ·   теряют маршрут 45 отсчётов</a:t>
+              <a:t>Δmin 2.36 п.п.   ·   Δmean 2.08 п.п.   ·   теряют маршрут 45 клиент-отсч.</a:t>
             </a:r>
             <a:endParaRPr lang="en-US" sz="1250" dirty="0"/>
           </a:p>
@@ -3211,7 +3211,7 @@
                 <a:ea typeface="Arial" pitchFamily="34" charset="-122"/>
                 <a:cs typeface="Arial" pitchFamily="34" charset="-120"/>
               </a:rPr>
-              <a:t>Δmin 2.36 п.п.   ·   Δmean 1.99 п.п.   ·   теряют маршрут 43 отсчёта</a:t>
+              <a:t>Δmin 2.36 п.п.   ·   Δmean 1.99 п.п.   ·   теряют маршрут 43 клиент-отсч.</a:t>
             </a:r>
             <a:endParaRPr lang="en-US" sz="1250" dirty="0"/>
           </a:p>
@@ -3316,7 +3316,7 @@
                 <a:ea typeface="Arial" pitchFamily="34" charset="-122"/>
                 <a:cs typeface="Arial" pitchFamily="34" charset="-120"/>
               </a:rPr>
-              <a:t>Δmin 2.36 п.п.   ·   Δmean 1.94 п.п.   ·   теряют маршрут 42 отсчёта</a:t>
+              <a:t>Δmin 2.36 п.п.   ·   Δmean 1.94 п.п.   ·   теряют маршрут 42 клиент-отсч.</a:t>
             </a:r>
             <a:endParaRPr lang="en-US" sz="1250" dirty="0"/>
           </a:p>
@@ -4411,7 +4411,7 @@
                 <a:ea typeface="Arial" pitchFamily="34" charset="-122"/>
                 <a:cs typeface="Arial" pitchFamily="34" charset="-120"/>
               </a:rPr>
-              <a:t>Этап развёртывания, RAAN</a:t>
+              <a:t>Этап, RAAN и фазирование —</a:t>
             </a:r>
             <a:endParaRPr lang="en-US" sz="1300" dirty="0"/>
           </a:p>
@@ -4431,7 +4431,7 @@
                 <a:ea typeface="Arial" pitchFamily="34" charset="-122"/>
                 <a:cs typeface="Arial" pitchFamily="34" charset="-120"/>
               </a:rPr>
-              <a:t>и фазирование, отказы —</a:t>
+              <a:t>проектные параметры; отказы —</a:t>
             </a:r>
             <a:endParaRPr lang="en-US" sz="1300" dirty="0"/>
           </a:p>
@@ -4451,7 +4451,7 @@
                 <a:ea typeface="Arial" pitchFamily="34" charset="-122"/>
                 <a:cs typeface="Arial" pitchFamily="34" charset="-120"/>
               </a:rPr>
-              <a:t>проектные параметры до запуска</a:t>
+              <a:t>сценарии проверки устойчивости</a:t>
             </a:r>
             <a:endParaRPr lang="en-US" sz="1300" dirty="0"/>
           </a:p>
@@ -4939,7 +4939,7 @@
                 <a:ea typeface="Arial" pitchFamily="34" charset="-122"/>
                 <a:cs typeface="Arial" pitchFamily="34" charset="-120"/>
               </a:rPr>
-              <a:t>Один экран: конфигурация → состояние сети → рекомендация</a:t>
+              <a:t>Один сервис: конфигурация → состояние сети → рекомендация</a:t>
             </a:r>
             <a:endParaRPr lang="en-US" sz="2800" dirty="0"/>
           </a:p>
@@ -5416,7 +5416,7 @@
                 <a:ea typeface="Arial" pitchFamily="34" charset="-122"/>
                 <a:cs typeface="Arial" pitchFamily="34" charset="-120"/>
               </a:rPr>
-              <a:t>Полная группировка выдерживает цель — ранняя стадия и стресс-сценарии нет</a:t>
+              <a:t>Штатная конфигурация достигает цели — этапы 1–2 и стресс-сценарии нет</a:t>
             </a:r>
             <a:endParaRPr lang="en-US" sz="2800" dirty="0"/>
           </a:p>
@@ -5560,7 +5560,7 @@
                 <a:ea typeface="Arial" pitchFamily="34" charset="-122"/>
                 <a:cs typeface="Arial" pitchFamily="34" charset="-120"/>
               </a:rPr>
-              <a:t>Где цель достигается</a:t>
+              <a:t>Сводка по сценариям</a:t>
             </a:r>
             <a:endParaRPr lang="en-US" sz="1500" dirty="0"/>
           </a:p>
@@ -6445,7 +6445,7 @@
                 <a:ea typeface="Arial" pitchFamily="34" charset="-122"/>
                 <a:cs typeface="Arial" pitchFamily="34" charset="-120"/>
               </a:rPr>
-              <a:t>все три пункта, 45 отсчётов теряют</a:t>
+              <a:t>все три пункта; 45 клиент-отсчетов</a:t>
             </a:r>
             <a:endParaRPr lang="en-US" sz="1300" dirty="0"/>
           </a:p>
@@ -6465,7 +6465,7 @@
                 <a:ea typeface="Arial" pitchFamily="34" charset="-122"/>
                 <a:cs typeface="Arial" pitchFamily="34" charset="-120"/>
               </a:rPr>
-              <a:t>маршрут</a:t>
+              <a:t>теряют маршрут</a:t>
             </a:r>
             <a:endParaRPr lang="en-US" sz="1300" dirty="0"/>
           </a:p>
@@ -6925,7 +6925,7 @@
                 <a:ea typeface="Arial" pitchFamily="34" charset="-122"/>
                 <a:cs typeface="Arial" pitchFamily="34" charset="-120"/>
               </a:rPr>
-              <a:t>резервные маршруты, не пересекающиеся с основным, и их доля по времени</a:t>
+              <a:t>резервные маршруты без общих внутренних спутников с основным путём</a:t>
             </a:r>
             <a:endParaRPr lang="en-US" sz="1200" dirty="0"/>
           </a:p>
@@ -7499,7 +7499,7 @@
                 <a:ea typeface="Arial" pitchFamily="34" charset="-122"/>
                 <a:cs typeface="Arial" pitchFamily="34" charset="-120"/>
               </a:rPr>
-              <a:t>Среди проверенных этапов развертывания и стресс-сценариев целевой</a:t>
+              <a:t>Среди проверенных этапов и стресс-сценариев цель ≥90%</a:t>
             </a:r>
             <a:endParaRPr lang="en-US" sz="2000" dirty="0"/>
           </a:p>
@@ -7519,7 +7519,7 @@
                 <a:ea typeface="Arial" pitchFamily="34" charset="-122"/>
                 <a:cs typeface="Arial" pitchFamily="34" charset="-120"/>
               </a:rPr>
-              <a:t>уровень ≥90% для всех трёх пунктов достигается только на этапе 3</a:t>
+              <a:t>для всех трёх пунктов достигается только на этапе 3</a:t>
             </a:r>
             <a:endParaRPr lang="en-US" sz="2000" dirty="0"/>
           </a:p>
@@ -7578,7 +7578,7 @@
                 <a:ea typeface="Arial" pitchFamily="34" charset="-122"/>
                 <a:cs typeface="Arial" pitchFamily="34" charset="-120"/>
               </a:rPr>
-              <a:t>96.7–98.9% доступности  ·  каждый разрыв воспроизводим в сервисе и в тестах</a:t>
+              <a:t>96.7–98.9% доступности  ·  расчёт воспроизводим в сервисе и автоматических тестах</a:t>
             </a:r>
             <a:endParaRPr lang="en-US" sz="1350" dirty="0"/>
           </a:p>
@@ -7677,7 +7677,7 @@
                 <a:ea typeface="Arial" pitchFamily="34" charset="-122"/>
                 <a:cs typeface="Arial" pitchFamily="34" charset="-120"/>
               </a:rPr>
-              <a:t>github.com/ivergit88/cosmohak  ·  gitverse.ru/hackrus.experts/kosmo-nizni_klodiki_148</a:t>
+              <a:t>gitverse.ru/hackrus.experts/kosmo-nizni_klodiki_148 — официальный репозиторий решения</a:t>
             </a:r>
             <a:endParaRPr lang="en-US" sz="1250" dirty="0"/>
           </a:p>

--- a/presentation/kosmo-nizni_klodiki_148.pptx
+++ b/presentation/kosmo-nizni_klodiki_148.pptx
@@ -2723,7 +2723,7 @@
                 <a:ea typeface="Arial" pitchFamily="34" charset="-122"/>
                 <a:cs typeface="Arial" pitchFamily="34" charset="-120"/>
               </a:rPr>
-              <a:t>и попробуйте сами</a:t>
+              <a:t>с телефона и попробуйте сами</a:t>
             </a:r>
             <a:endParaRPr lang="en-US" sz="1000" dirty="0"/>
           </a:p>
@@ -2808,7 +2808,7 @@
                 <a:ea typeface="Arial" pitchFamily="34" charset="-122"/>
                 <a:cs typeface="Arial" pitchFamily="34" charset="-120"/>
               </a:rPr>
-              <a:t>github.com/ivergit88/cosmohak</a:t>
+              <a:t>gitverse.ru/hackrus.experts/kosmo-nizni_klodiki_148 — официальный репозиторий</a:t>
             </a:r>
             <a:endParaRPr lang="en-US" sz="1400" dirty="0"/>
           </a:p>
@@ -3001,7 +3001,7 @@
                 <a:ea typeface="Arial" pitchFamily="34" charset="-122"/>
                 <a:cs typeface="Arial" pitchFamily="34" charset="-120"/>
               </a:rPr>
-              <a:t>Топ критичности (полная группировка, single-outage анализ)</a:t>
+              <a:t>Топ критичности (полная группировка, анализ одиночного отказа)</a:t>
             </a:r>
             <a:endParaRPr lang="en-US" sz="1500" dirty="0"/>
           </a:p>
@@ -4093,7 +4093,7 @@
                 <a:ea typeface="Arial" pitchFamily="34" charset="-122"/>
                 <a:cs typeface="Arial" pitchFamily="34" charset="-120"/>
               </a:rPr>
-              <a:t>Рельеф/застройка упомянуты постановщиком как развитие и не влияют на текущие критерии оценки</a:t>
+              <a:t>Рельеф и застройка упомянуты постановщиком как возможное развитие и не входят в обязательную базовую модель кейса</a:t>
             </a:r>
             <a:endParaRPr lang="en-US" sz="1100" dirty="0"/>
           </a:p>
@@ -4984,105 +4984,61 @@
           </a:p>
         </p:txBody>
       </p:sp>
+      <p:sp>
+        <p:nvSpPr>
+          <p:cNvPr id="5" name="Text 3"/>
+          <p:cNvSpPr/>
+          <p:nvPr/>
+        </p:nvSpPr>
+        <p:spPr>
+          <a:xfrm>
+            <a:off x="548640" y="1783080"/>
+            <a:ext cx="7680960" cy="274320"/>
+          </a:xfrm>
+          <a:prstGeom prst="rect">
+            <a:avLst/>
+          </a:prstGeom>
+          <a:noFill/>
+          <a:ln/>
+        </p:spPr>
+        <p:txBody>
+          <a:bodyPr wrap="square" lIns="0" tIns="0" rIns="0" bIns="0" rtlCol="0" anchor="ctr"/>
+          <a:lstStyle/>
+          <a:p>
+            <a:pPr indent="0" marL="0">
+              <a:buNone/>
+            </a:pPr>
+            <a:r>
+              <a:rPr lang="en-US" sz="1250" b="1" dirty="0">
+                <a:solidFill>
+                  <a:srgbClr val="EAF2F8"/>
+                </a:solidFill>
+                <a:latin typeface="Arial" pitchFamily="34" charset="0"/>
+                <a:ea typeface="Arial" pitchFamily="34" charset="-122"/>
+                <a:cs typeface="Arial" pitchFamily="34" charset="-120"/>
+              </a:rPr>
+              <a:t>Видеодемонстрация работы сервиса (35 секунд, со звуком не требуется — всё видно)</a:t>
+            </a:r>
+            <a:endParaRPr lang="en-US" sz="1250" dirty="0"/>
+          </a:p>
+        </p:txBody>
+      </p:sp>
       <p:pic>
         <p:nvPicPr>
-          <p:cNvPr id="5" name="Image 0" descr="C:\Users\Administrator\Desktop\cosmohak\presentation\img\crop_config.png">    </p:cNvPr>
+          <p:cNvPr id="3" name="Media 0">
+            <a:hlinkClick r:id="" action="ppaction://media"/>
+          </p:cNvPr>
           <p:cNvPicPr>
             <a:picLocks noChangeAspect="1"/>
           </p:cNvPicPr>
-          <p:nvPr/>
-        </p:nvPicPr>
-        <p:blipFill>
-          <a:blip r:embed="rId1"/>
-          <a:stretch>
-            <a:fillRect/>
-          </a:stretch>
-        </p:blipFill>
-        <p:spPr>
-          <a:xfrm>
-            <a:off x="548640" y="1810512"/>
-            <a:ext cx="1783080" cy="3419856"/>
-          </a:xfrm>
-          <a:prstGeom prst="rect">
-            <a:avLst/>
-          </a:prstGeom>
-        </p:spPr>
-      </p:pic>
-      <p:sp>
-        <p:nvSpPr>
-          <p:cNvPr id="6" name="Shape 3"/>
-          <p:cNvSpPr/>
-          <p:nvPr/>
-        </p:nvSpPr>
-        <p:spPr>
-          <a:xfrm>
-            <a:off x="548640" y="1810512"/>
-            <a:ext cx="1783080" cy="3419856"/>
-          </a:xfrm>
-          <a:prstGeom prst="rect">
-            <a:avLst/>
-          </a:prstGeom>
-          <a:ln w="12700">
-            <a:solidFill>
-              <a:srgbClr val="3B7AB8"/>
-            </a:solidFill>
-            <a:prstDash val="solid"/>
-          </a:ln>
-        </p:spPr>
-      </p:sp>
-      <p:pic>
-        <p:nvPicPr>
-          <p:cNvPr id="7" name="Image 1" descr="C:\Users\Administrator\Desktop\cosmohak\presentation\img\crop_network.png">    </p:cNvPr>
-          <p:cNvPicPr>
-            <a:picLocks noChangeAspect="1"/>
-          </p:cNvPicPr>
-          <p:nvPr/>
-        </p:nvPicPr>
-        <p:blipFill>
-          <a:blip r:embed="rId2"/>
-          <a:stretch>
-            <a:fillRect/>
-          </a:stretch>
-        </p:blipFill>
-        <p:spPr>
-          <a:xfrm>
-            <a:off x="2560320" y="1810512"/>
-            <a:ext cx="6464808" cy="3931920"/>
-          </a:xfrm>
-          <a:prstGeom prst="rect">
-            <a:avLst/>
-          </a:prstGeom>
-        </p:spPr>
-      </p:pic>
-      <p:sp>
-        <p:nvSpPr>
-          <p:cNvPr id="8" name="Shape 4"/>
-          <p:cNvSpPr/>
-          <p:nvPr/>
-        </p:nvSpPr>
-        <p:spPr>
-          <a:xfrm>
-            <a:off x="2560320" y="1810512"/>
-            <a:ext cx="6464808" cy="3931920"/>
-          </a:xfrm>
-          <a:prstGeom prst="rect">
-            <a:avLst/>
-          </a:prstGeom>
-          <a:ln w="12700">
-            <a:solidFill>
-              <a:srgbClr val="3B7AB8"/>
-            </a:solidFill>
-            <a:prstDash val="solid"/>
-          </a:ln>
-        </p:spPr>
-      </p:sp>
-      <p:pic>
-        <p:nvPicPr>
-          <p:cNvPr id="9" name="Image 2" descr="C:\Users\Administrator\Desktop\cosmohak\presentation\img\crop_summary.png">    </p:cNvPr>
-          <p:cNvPicPr>
-            <a:picLocks noChangeAspect="1"/>
-          </p:cNvPicPr>
-          <p:nvPr/>
+          <p:nvPr>
+            <a:videoFile r:link="rId1"/>
+            <p:extLst>
+              <p:ext uri="{DAA4B4D4-6D71-4841-9C94-3DE7FCFB9230}">
+                <p14:media xmlns:p14="http://schemas.microsoft.com/office/powerpoint/2010/main" r:embed="rId2"/>
+              </p:ext>
+            </p:extLst>
+          </p:nvPr>
         </p:nvPicPr>
         <p:blipFill>
           <a:blip r:embed="rId3"/>
@@ -5092,8 +5048,8 @@
         </p:blipFill>
         <p:spPr>
           <a:xfrm>
-            <a:off x="2560320" y="5870448"/>
-            <a:ext cx="5120640" cy="868680"/>
+            <a:off x="548640" y="2148840"/>
+            <a:ext cx="7680960" cy="4320540"/>
           </a:xfrm>
           <a:prstGeom prst="rect">
             <a:avLst/>
@@ -5102,14 +5058,14 @@
       </p:pic>
       <p:sp>
         <p:nvSpPr>
-          <p:cNvPr id="10" name="Shape 5"/>
-          <p:cNvSpPr/>
-          <p:nvPr/>
-        </p:nvSpPr>
-        <p:spPr>
-          <a:xfrm>
-            <a:off x="2560320" y="5870448"/>
-            <a:ext cx="5120640" cy="868680"/>
+          <p:cNvPr id="7" name="Shape 4"/>
+          <p:cNvSpPr/>
+          <p:nvPr/>
+        </p:nvSpPr>
+        <p:spPr>
+          <a:xfrm>
+            <a:off x="548640" y="2148840"/>
+            <a:ext cx="7680960" cy="4320540"/>
           </a:xfrm>
           <a:prstGeom prst="rect">
             <a:avLst/>
@@ -5124,30 +5080,73 @@
       </p:sp>
       <p:sp>
         <p:nvSpPr>
-          <p:cNvPr id="11" name="Text 6"/>
-          <p:cNvSpPr/>
-          <p:nvPr/>
-        </p:nvSpPr>
-        <p:spPr>
-          <a:xfrm>
-            <a:off x="9555480" y="2103120"/>
-            <a:ext cx="2194560" cy="1463040"/>
-          </a:xfrm>
-          <a:prstGeom prst="rect">
-            <a:avLst/>
-          </a:prstGeom>
-          <a:noFill/>
-          <a:ln/>
-        </p:spPr>
-        <p:txBody>
-          <a:bodyPr wrap="square" lIns="0" tIns="0" rIns="0" bIns="0" rtlCol="0" anchor="ctr"/>
-          <a:lstStyle/>
-          <a:p>
-            <a:pPr indent="0" marL="0">
-              <a:buNone/>
-            </a:pPr>
-            <a:r>
-              <a:rPr lang="en-US" sz="1300" dirty="0">
+          <p:cNvPr id="8" name="Text 5"/>
+          <p:cNvSpPr/>
+          <p:nvPr/>
+        </p:nvSpPr>
+        <p:spPr>
+          <a:xfrm>
+            <a:off x="8549640" y="2148840"/>
+            <a:ext cx="3108960" cy="320040"/>
+          </a:xfrm>
+          <a:prstGeom prst="rect">
+            <a:avLst/>
+          </a:prstGeom>
+          <a:noFill/>
+          <a:ln/>
+        </p:spPr>
+        <p:txBody>
+          <a:bodyPr wrap="square" lIns="0" tIns="0" rIns="0" bIns="0" rtlCol="0" anchor="ctr"/>
+          <a:lstStyle/>
+          <a:p>
+            <a:pPr indent="0" marL="0">
+              <a:buNone/>
+            </a:pPr>
+            <a:r>
+              <a:rPr lang="en-US" sz="1350" b="1" dirty="0">
+                <a:solidFill>
+                  <a:srgbClr val="9FC0DC"/>
+                </a:solidFill>
+                <a:latin typeface="Arial" pitchFamily="34" charset="0"/>
+                <a:ea typeface="Arial" pitchFamily="34" charset="-122"/>
+                <a:cs typeface="Arial" pitchFamily="34" charset="-120"/>
+              </a:rPr>
+              <a:t>Что в записи:</a:t>
+            </a:r>
+            <a:endParaRPr lang="en-US" sz="1350" dirty="0"/>
+          </a:p>
+        </p:txBody>
+      </p:sp>
+      <p:sp>
+        <p:nvSpPr>
+          <p:cNvPr id="9" name="Text 6"/>
+          <p:cNvSpPr/>
+          <p:nvPr/>
+        </p:nvSpPr>
+        <p:spPr>
+          <a:xfrm>
+            <a:off x="8549640" y="2560320"/>
+            <a:ext cx="3108960" cy="2377440"/>
+          </a:xfrm>
+          <a:prstGeom prst="rect">
+            <a:avLst/>
+          </a:prstGeom>
+          <a:noFill/>
+          <a:ln/>
+        </p:spPr>
+        <p:txBody>
+          <a:bodyPr wrap="square" lIns="0" tIns="0" rIns="0" bIns="0" rtlCol="0" anchor="ctr"/>
+          <a:lstStyle/>
+          <a:p>
+            <a:pPr marL="152400" indent="-152400">
+              <a:spcAft>
+                <a:spcPts val="1000"/>
+              </a:spcAft>
+              <a:buSzPct val="100000"/>
+              <a:buChar char="▸"/>
+            </a:pPr>
+            <a:r>
+              <a:rPr lang="en-US" sz="1250" dirty="0">
                 <a:solidFill>
                   <a:srgbClr val="EAF2F8"/>
                 </a:solidFill>
@@ -5155,16 +5154,20 @@
                 <a:ea typeface="Arial" pitchFamily="34" charset="-122"/>
                 <a:cs typeface="Arial" pitchFamily="34" charset="-120"/>
               </a:rPr>
-              <a:t>Интерфейс на русском:</a:t>
-            </a:r>
-            <a:endParaRPr lang="en-US" sz="1300" dirty="0"/>
-          </a:p>
-          <a:p>
-            <a:pPr indent="0" marL="0">
-              <a:buNone/>
-            </a:pPr>
-            <a:r>
-              <a:rPr lang="en-US" sz="1300" dirty="0">
+              <a:t>карточки доступности по каждому пункту</a:t>
+            </a:r>
+            <a:endParaRPr lang="en-US" sz="1250" dirty="0"/>
+          </a:p>
+          <a:p>
+            <a:pPr marL="152400" indent="-152400">
+              <a:spcAft>
+                <a:spcPts val="1000"/>
+              </a:spcAft>
+              <a:buSzPct val="100000"/>
+              <a:buChar char="▸"/>
+            </a:pPr>
+            <a:r>
+              <a:rPr lang="en-US" sz="1250" dirty="0">
                 <a:solidFill>
                   <a:srgbClr val="EAF2F8"/>
                 </a:solidFill>
@@ -5172,16 +5175,20 @@
                 <a:ea typeface="Arial" pitchFamily="34" charset="-122"/>
                 <a:cs typeface="Arial" pitchFamily="34" charset="-120"/>
               </a:rPr>
-              <a:t>скрытый сценарий жюри</a:t>
-            </a:r>
-            <a:endParaRPr lang="en-US" sz="1300" dirty="0"/>
-          </a:p>
-          <a:p>
-            <a:pPr indent="0" marL="0">
-              <a:buNone/>
-            </a:pPr>
-            <a:r>
-              <a:rPr lang="en-US" sz="1300" dirty="0">
+              <a:t>3D-схема сети: спутники, связи, маршрут</a:t>
+            </a:r>
+            <a:endParaRPr lang="en-US" sz="1250" dirty="0"/>
+          </a:p>
+          <a:p>
+            <a:pPr marL="152400" indent="-152400">
+              <a:spcAft>
+                <a:spcPts val="1000"/>
+              </a:spcAft>
+              <a:buSzPct val="100000"/>
+              <a:buChar char="▸"/>
+            </a:pPr>
+            <a:r>
+              <a:rPr lang="en-US" sz="1250" dirty="0">
                 <a:solidFill>
                   <a:srgbClr val="EAF2F8"/>
                 </a:solidFill>
@@ -5189,38 +5196,59 @@
                 <a:ea typeface="Arial" pitchFamily="34" charset="-122"/>
                 <a:cs typeface="Arial" pitchFamily="34" charset="-120"/>
               </a:rPr>
-              <a:t>проходит без правок кода</a:t>
-            </a:r>
-            <a:endParaRPr lang="en-US" sz="1300" dirty="0"/>
-          </a:p>
-        </p:txBody>
-      </p:sp>
-      <p:sp>
-        <p:nvSpPr>
-          <p:cNvPr id="12" name="Text 7"/>
-          <p:cNvSpPr/>
-          <p:nvPr/>
-        </p:nvSpPr>
-        <p:spPr>
-          <a:xfrm>
-            <a:off x="9555480" y="3749040"/>
-            <a:ext cx="2194560" cy="2011680"/>
-          </a:xfrm>
-          <a:prstGeom prst="rect">
-            <a:avLst/>
-          </a:prstGeom>
-          <a:noFill/>
-          <a:ln/>
-        </p:spPr>
-        <p:txBody>
-          <a:bodyPr wrap="square" lIns="0" tIns="0" rIns="0" bIns="0" rtlCol="0" anchor="ctr"/>
-          <a:lstStyle/>
-          <a:p>
-            <a:pPr indent="0" marL="0">
-              <a:buNone/>
-            </a:pPr>
-            <a:r>
-              <a:rPr lang="en-US" sz="1300" dirty="0">
+              <a:t>прыжок к перерыву — причина разрыва</a:t>
+            </a:r>
+            <a:endParaRPr lang="en-US" sz="1250" dirty="0"/>
+          </a:p>
+          <a:p>
+            <a:pPr marL="152400" indent="-152400">
+              <a:spcAft>
+                <a:spcPts val="1000"/>
+              </a:spcAft>
+              <a:buSzPct val="100000"/>
+              <a:buChar char="▸"/>
+            </a:pPr>
+            <a:r>
+              <a:rPr lang="en-US" sz="1250" dirty="0">
+                <a:solidFill>
+                  <a:srgbClr val="EAF2F8"/>
+                </a:solidFill>
+                <a:latin typeface="Arial" pitchFamily="34" charset="0"/>
+                <a:ea typeface="Arial" pitchFamily="34" charset="-122"/>
+                <a:cs typeface="Arial" pitchFamily="34" charset="-120"/>
+              </a:rPr>
+              <a:t>шкала состояний за сутки по всем пунктам</a:t>
+            </a:r>
+            <a:endParaRPr lang="en-US" sz="1250" dirty="0"/>
+          </a:p>
+        </p:txBody>
+      </p:sp>
+      <p:sp>
+        <p:nvSpPr>
+          <p:cNvPr id="10" name="Text 7"/>
+          <p:cNvSpPr/>
+          <p:nvPr/>
+        </p:nvSpPr>
+        <p:spPr>
+          <a:xfrm>
+            <a:off x="8549640" y="5120640"/>
+            <a:ext cx="3108960" cy="1097280"/>
+          </a:xfrm>
+          <a:prstGeom prst="rect">
+            <a:avLst/>
+          </a:prstGeom>
+          <a:noFill/>
+          <a:ln/>
+        </p:spPr>
+        <p:txBody>
+          <a:bodyPr wrap="square" lIns="0" tIns="0" rIns="0" bIns="0" rtlCol="0" anchor="ctr"/>
+          <a:lstStyle/>
+          <a:p>
+            <a:pPr indent="0" marL="0">
+              <a:buNone/>
+            </a:pPr>
+            <a:r>
+              <a:rPr lang="en-US" sz="1200" dirty="0">
                 <a:solidFill>
                   <a:srgbClr val="8FA5B8"/>
                 </a:solidFill>
@@ -5228,43 +5256,9 @@
                 <a:ea typeface="Arial" pitchFamily="34" charset="-122"/>
                 <a:cs typeface="Arial" pitchFamily="34" charset="-120"/>
               </a:rPr>
-              <a:t>3D-схема сети, шкала состояний</a:t>
-            </a:r>
-            <a:endParaRPr lang="en-US" sz="1300" dirty="0"/>
-          </a:p>
-          <a:p>
-            <a:pPr indent="0" marL="0">
-              <a:buNone/>
-            </a:pPr>
-            <a:r>
-              <a:rPr lang="en-US" sz="1300" dirty="0">
-                <a:solidFill>
-                  <a:srgbClr val="8FA5B8"/>
-                </a:solidFill>
-                <a:latin typeface="Arial" pitchFamily="34" charset="0"/>
-                <a:ea typeface="Arial" pitchFamily="34" charset="-122"/>
-                <a:cs typeface="Arial" pitchFamily="34" charset="-120"/>
-              </a:rPr>
-              <a:t>по всем пунктам, таблица метрик</a:t>
-            </a:r>
-            <a:endParaRPr lang="en-US" sz="1300" dirty="0"/>
-          </a:p>
-          <a:p>
-            <a:pPr indent="0" marL="0">
-              <a:buNone/>
-            </a:pPr>
-            <a:r>
-              <a:rPr lang="en-US" sz="1300" dirty="0">
-                <a:solidFill>
-                  <a:srgbClr val="8FA5B8"/>
-                </a:solidFill>
-                <a:latin typeface="Arial" pitchFamily="34" charset="0"/>
-                <a:ea typeface="Arial" pitchFamily="34" charset="-122"/>
-                <a:cs typeface="Arial" pitchFamily="34" charset="-120"/>
-              </a:rPr>
-              <a:t>и рекомендация с цифрами</a:t>
-            </a:r>
-            <a:endParaRPr lang="en-US" sz="1300" dirty="0"/>
+              <a:t>▶ нажмите на видео при показе. Живой стенд — по QR на титуле.</a:t>
+            </a:r>
+            <a:endParaRPr lang="en-US" sz="1200" dirty="0"/>
           </a:p>
         </p:txBody>
       </p:sp>
@@ -5416,7 +5410,7 @@
                 <a:ea typeface="Arial" pitchFamily="34" charset="-122"/>
                 <a:cs typeface="Arial" pitchFamily="34" charset="-120"/>
               </a:rPr>
-              <a:t>Штатная конфигурация достигает цели — этапы 1–2 и стресс-сценарии нет</a:t>
+              <a:t>Среди проверенных сценариев целевой уровень достигает только полная штатная конфигурация</a:t>
             </a:r>
             <a:endParaRPr lang="en-US" sz="2800" dirty="0"/>
           </a:p>
@@ -6387,7 +6381,7 @@
                 <a:cs typeface="Arial" pitchFamily="34" charset="-120"/>
               </a:rPr>
               <a:t>№1 в ранжировании критичности
-по single-outage анализу:
+по анализу одиночного отказа:
 </a:t>
             </a:r>
             <a:pPr indent="0" marL="0">
@@ -7499,7 +7493,7 @@
                 <a:ea typeface="Arial" pitchFamily="34" charset="-122"/>
                 <a:cs typeface="Arial" pitchFamily="34" charset="-120"/>
               </a:rPr>
-              <a:t>Среди проверенных этапов и стресс-сценариев цель ≥90%</a:t>
+              <a:t>Среди проверенных этапов и стресс-сценариев</a:t>
             </a:r>
             <a:endParaRPr lang="en-US" sz="2000" dirty="0"/>
           </a:p>
@@ -7519,7 +7513,7 @@
                 <a:ea typeface="Arial" pitchFamily="34" charset="-122"/>
                 <a:cs typeface="Arial" pitchFamily="34" charset="-120"/>
               </a:rPr>
-              <a:t>для всех трёх пунктов достигается только на этапе 3</a:t>
+              <a:t>целевой уровень ≥90% для всех трёх пунктов</a:t>
             </a:r>
             <a:endParaRPr lang="en-US" sz="2000" dirty="0"/>
           </a:p>
@@ -7539,7 +7533,7 @@
                 <a:ea typeface="Arial" pitchFamily="34" charset="-122"/>
                 <a:cs typeface="Arial" pitchFamily="34" charset="-120"/>
               </a:rPr>
-              <a:t>при штатной дальности ISL 3000 км</a:t>
+              <a:t>достигается только на этапе 3 при штатной дальности ISL 3000 км</a:t>
             </a:r>
             <a:endParaRPr lang="en-US" sz="2000" dirty="0"/>
           </a:p>
@@ -8666,7 +8660,7 @@
                 <a:ea typeface="Arial" pitchFamily="34" charset="-122"/>
                 <a:cs typeface="Arial" pitchFamily="34" charset="-120"/>
               </a:rPr>
-              <a:t>131</a:t>
+              <a:t>133</a:t>
             </a:r>
             <a:endParaRPr lang="en-US" sz="4600" dirty="0"/>
           </a:p>
@@ -8705,7 +8699,7 @@
                 <a:ea typeface="Arial" pitchFamily="34" charset="-122"/>
                 <a:cs typeface="Arial" pitchFamily="34" charset="-120"/>
               </a:rPr>
-              <a:t>автотест: валидация (44 граничных</a:t>
+              <a:t>автотеста: валидация (46 граничных</a:t>
             </a:r>
             <a:endParaRPr lang="en-US" sz="1250" dirty="0"/>
           </a:p>
